--- a/Slides/CSC6032/Advanced-OS-07-P2P.pptx
+++ b/Slides/CSC6032/Advanced-OS-07-P2P.pptx
@@ -8790,41 +8790,8 @@
             </a:pPr>
             <a:r>
               <a:rPr dirty="0"/>
-              <a:t>Partially</a:t>
-            </a:r>
-            <a:r>
-              <a:rPr dirty="0">
-                <a:solidFill>
-                  <a:srgbClr val="336764"/>
-                </a:solidFill>
-              </a:rPr>
-              <a:t> </a:t>
-            </a:r>
-            <a:r>
-              <a:rPr dirty="0">
-                <a:solidFill>
-                  <a:srgbClr val="002060"/>
-                </a:solidFill>
-              </a:rPr>
-              <a:t>Centralized</a:t>
-            </a:r>
-            <a:r>
-              <a:rPr dirty="0">
-                <a:solidFill>
-                  <a:srgbClr val="346466"/>
-                </a:solidFill>
-              </a:rPr>
-              <a:t> </a:t>
-            </a:r>
-            <a:r>
-              <a:rPr dirty="0">
-                <a:solidFill>
-                  <a:srgbClr val="336669"/>
-                </a:solidFill>
-              </a:rPr>
-              <a:t>Architectures</a:t>
-            </a:r>
-            <a:endParaRPr dirty="0"/>
+              <a:t>Partially Centralized Architectures</a:t>
+            </a:r>
           </a:p>
         </p:txBody>
       </p:sp>
@@ -9561,21 +9528,9 @@
           <a:p>
             <a:r>
               <a:rPr lang="en-US" altLang="zh-CN" kern="0" dirty="0"/>
-              <a:t>Partially</a:t>
-            </a:r>
-            <a:r>
-              <a:rPr lang="en-US" altLang="zh-CN" kern="0" dirty="0">
-                <a:solidFill>
-                  <a:srgbClr val="002060"/>
-                </a:solidFill>
-              </a:rPr>
-              <a:t> Centralized Systems (1)</a:t>
-            </a:r>
-            <a:endParaRPr lang="zh-CN" altLang="en-US" dirty="0">
-              <a:solidFill>
-                <a:srgbClr val="002060"/>
-              </a:solidFill>
-            </a:endParaRPr>
+              <a:t>Partially Centralized Systems (1)</a:t>
+            </a:r>
+            <a:endParaRPr lang="zh-CN" altLang="en-US" dirty="0"/>
           </a:p>
         </p:txBody>
       </p:sp>
@@ -10942,21 +10897,9 @@
           <a:p>
             <a:r>
               <a:rPr lang="en-US" altLang="zh-CN" kern="0" dirty="0"/>
-              <a:t>Partially</a:t>
-            </a:r>
-            <a:r>
-              <a:rPr lang="en-US" altLang="zh-CN" kern="0" dirty="0">
-                <a:solidFill>
-                  <a:srgbClr val="002060"/>
-                </a:solidFill>
-              </a:rPr>
-              <a:t> Centralized Systems (2)</a:t>
-            </a:r>
-            <a:endParaRPr lang="zh-CN" altLang="en-US" dirty="0">
-              <a:solidFill>
-                <a:srgbClr val="002060"/>
-              </a:solidFill>
-            </a:endParaRPr>
+              <a:t>Partially Centralized Systems (2)</a:t>
+            </a:r>
+            <a:endParaRPr lang="zh-CN" altLang="en-US" dirty="0"/>
           </a:p>
         </p:txBody>
       </p:sp>
